--- a/dist/초5/영어/상호작용과문화/초5_영어_상호작용과문화_02_물건사기_학생용.pptx
+++ b/dist/초5/영어/상호작용과문화/초5_영어_상호작용과문화_02_물건사기_학생용.pptx
@@ -119,20 +119,20 @@
   <p:extLst>
     <p:ext uri="{521415D9-36F7-43E2-AB2F-B90AF26B5E84}">
       <p14:sectionLst xmlns:p14="http://schemas.microsoft.com/office/powerpoint/2010/main">
-        <p14:section name="도입" id="{71e6cac7-74a2-4350-e932-0e330a344a62}">
+        <p14:section name="도입" id="{e4749690-1337-6d3f-e23b-805055a7b72b}">
           <p14:sldIdLst>
             <p14:sldId id="256"/>
             <p14:sldId id="257"/>
           </p14:sldIdLst>
         </p14:section>
-        <p14:section name="개념" id="{cb4f5f4e-f10b-8050-e581-1a9f2ed6780c}">
+        <p14:section name="개념" id="{6b8d7764-00d4-be2f-d626-af1fc4c36e19}">
           <p14:sldIdLst>
             <p14:sldId id="258"/>
             <p14:sldId id="259"/>
             <p14:sldId id="260"/>
           </p14:sldIdLst>
         </p14:section>
-        <p14:section name="연습" id="{2b51240c-9c7f-0314-baa5-54d85086c367}">
+        <p14:section name="연습" id="{d48d71b9-c36d-020f-81a8-2c539562bc5c}">
           <p14:sldIdLst>
             <p14:sldId id="261"/>
             <p14:sldId id="262"/>
@@ -140,18 +140,18 @@
             <p14:sldId id="264"/>
           </p14:sldIdLst>
         </p14:section>
-        <p14:section name="확인" id="{7140cd1e-6b4c-c006-80e4-2ef01d278f3e}">
+        <p14:section name="확인" id="{fbab9561-254b-9fdf-58d6-4ea8f1ad864b}">
           <p14:sldIdLst>
             <p14:sldId id="265"/>
             <p14:sldId id="266"/>
           </p14:sldIdLst>
         </p14:section>
-        <p14:section name="정리" id="{eb0c3b66-c7aa-f7e5-d6a6-bf40a4b2ed9f}">
+        <p14:section name="정리" id="{bcc56d9e-5bab-fb48-e2b9-78ab94901ab7}">
           <p14:sldIdLst>
             <p14:sldId id="267"/>
           </p14:sldIdLst>
         </p14:section>
-        <p14:section name="보충" id="{cbe3176d-ebfc-815c-722f-890fb01b7a13}">
+        <p14:section name="보충" id="{2e46e73e-f5ff-dd4f-a04a-036d125ddb8d}">
           <p14:sldIdLst>
             <p14:sldId id="268"/>
           </p14:sldIdLst>
